--- a/LandEvolve_Components_Manual.pptx
+++ b/LandEvolve_Components_Manual.pptx
@@ -23011,7 +23011,7 @@
                 </a:solidFill>
                 <a:latin typeface="Calibri"/>
               </a:rPr>
-              <a:t>  default 1.0; dropped when Precipitation is on</a:t>
+              <a:t>  default 1.0; dropped when Precipitation or Vegetation is on</a:t>
             </a:r>
           </a:p>
           <a:p>
@@ -24899,7 +24899,7 @@
                 </a:solidFill>
                 <a:latin typeface="Calibri"/>
               </a:rPr>
-              <a:t>Wraps Landlab's DepthDependentDiffuser (Johnstone &amp; Hilley 2015). Soil drifts faster on steeper slopes, but only where there's soil to move — bare bedrock doesn't 'flow'.</a:t>
+              <a:t>Wraps Landlab's DepthDependentDiffuser (Johnstone &amp; Hilley 2015). Soil drifts faster on steeper slopes, but only where there's soil to move — bare bedrock doesn't 'flow'. Landlab's diffuser has no stability check of its own (explicit diffusion needs dt ≤ cell²/(4·K)); this wrapper auto-substeps internally so results stay correct at any dt or grid resolution you pick.</a:t>
             </a:r>
           </a:p>
         </p:txBody>

--- a/LandEvolve_Components_Manual.pptx
+++ b/LandEvolve_Components_Manual.pptx
@@ -6296,7 +6296,7 @@
                 </a:solidFill>
                 <a:latin typeface="Calibri"/>
               </a:rPr>
-              <a:t>switch cover at a chosen time — e.g. grass → trees (regrowth), or forest → cleared (deforestation, wildfire).</a:t>
+              <a:t>switch cover at a chosen year — e.g. grass → trees (regrowth), or forest → cleared (deforestation, wildfire).</a:t>
             </a:r>
           </a:p>
         </p:txBody>
